--- a/Chap/Prog01/Presentations/Logic.pptx
+++ b/Chap/Prog01/Presentations/Logic.pptx
@@ -23,9 +23,11 @@
     <p:sldId id="303" r:id="rId17"/>
     <p:sldId id="304" r:id="rId18"/>
     <p:sldId id="314" r:id="rId19"/>
-    <p:sldId id="305" r:id="rId20"/>
-    <p:sldId id="306" r:id="rId21"/>
-    <p:sldId id="315" r:id="rId22"/>
+    <p:sldId id="317" r:id="rId20"/>
+    <p:sldId id="318" r:id="rId21"/>
+    <p:sldId id="305" r:id="rId22"/>
+    <p:sldId id="306" r:id="rId23"/>
+    <p:sldId id="315" r:id="rId24"/>
   </p:sldIdLst>
   <p:sldSz cx="12192000" cy="6858000"/>
   <p:notesSz cx="6858000" cy="9144000"/>
@@ -261,7 +263,7 @@
           <a:p>
             <a:fld id="{E15B7D8E-2A20-4C0E-991C-872DBB7459A8}" type="datetimeFigureOut">
               <a:rPr lang="da-DK" smtClean="0"/>
-              <a:t>25-07-2025</a:t>
+              <a:t>05-01-2026</a:t>
             </a:fld>
             <a:endParaRPr lang="da-DK"/>
           </a:p>
@@ -429,7 +431,7 @@
           <a:p>
             <a:fld id="{E15B7D8E-2A20-4C0E-991C-872DBB7459A8}" type="datetimeFigureOut">
               <a:rPr lang="da-DK" smtClean="0"/>
-              <a:t>25-07-2025</a:t>
+              <a:t>05-01-2026</a:t>
             </a:fld>
             <a:endParaRPr lang="da-DK"/>
           </a:p>
@@ -607,7 +609,7 @@
           <a:p>
             <a:fld id="{E15B7D8E-2A20-4C0E-991C-872DBB7459A8}" type="datetimeFigureOut">
               <a:rPr lang="da-DK" smtClean="0"/>
-              <a:t>25-07-2025</a:t>
+              <a:t>05-01-2026</a:t>
             </a:fld>
             <a:endParaRPr lang="da-DK"/>
           </a:p>
@@ -775,7 +777,7 @@
           <a:p>
             <a:fld id="{E15B7D8E-2A20-4C0E-991C-872DBB7459A8}" type="datetimeFigureOut">
               <a:rPr lang="da-DK" smtClean="0"/>
-              <a:t>25-07-2025</a:t>
+              <a:t>05-01-2026</a:t>
             </a:fld>
             <a:endParaRPr lang="da-DK"/>
           </a:p>
@@ -1020,7 +1022,7 @@
           <a:p>
             <a:fld id="{E15B7D8E-2A20-4C0E-991C-872DBB7459A8}" type="datetimeFigureOut">
               <a:rPr lang="da-DK" smtClean="0"/>
-              <a:t>25-07-2025</a:t>
+              <a:t>05-01-2026</a:t>
             </a:fld>
             <a:endParaRPr lang="da-DK"/>
           </a:p>
@@ -1249,7 +1251,7 @@
           <a:p>
             <a:fld id="{E15B7D8E-2A20-4C0E-991C-872DBB7459A8}" type="datetimeFigureOut">
               <a:rPr lang="da-DK" smtClean="0"/>
-              <a:t>25-07-2025</a:t>
+              <a:t>05-01-2026</a:t>
             </a:fld>
             <a:endParaRPr lang="da-DK"/>
           </a:p>
@@ -1613,7 +1615,7 @@
           <a:p>
             <a:fld id="{E15B7D8E-2A20-4C0E-991C-872DBB7459A8}" type="datetimeFigureOut">
               <a:rPr lang="da-DK" smtClean="0"/>
-              <a:t>25-07-2025</a:t>
+              <a:t>05-01-2026</a:t>
             </a:fld>
             <a:endParaRPr lang="da-DK"/>
           </a:p>
@@ -1730,7 +1732,7 @@
           <a:p>
             <a:fld id="{E15B7D8E-2A20-4C0E-991C-872DBB7459A8}" type="datetimeFigureOut">
               <a:rPr lang="da-DK" smtClean="0"/>
-              <a:t>25-07-2025</a:t>
+              <a:t>05-01-2026</a:t>
             </a:fld>
             <a:endParaRPr lang="da-DK"/>
           </a:p>
@@ -1825,7 +1827,7 @@
           <a:p>
             <a:fld id="{E15B7D8E-2A20-4C0E-991C-872DBB7459A8}" type="datetimeFigureOut">
               <a:rPr lang="da-DK" smtClean="0"/>
-              <a:t>25-07-2025</a:t>
+              <a:t>05-01-2026</a:t>
             </a:fld>
             <a:endParaRPr lang="da-DK"/>
           </a:p>
@@ -2100,7 +2102,7 @@
           <a:p>
             <a:fld id="{E15B7D8E-2A20-4C0E-991C-872DBB7459A8}" type="datetimeFigureOut">
               <a:rPr lang="da-DK" smtClean="0"/>
-              <a:t>25-07-2025</a:t>
+              <a:t>05-01-2026</a:t>
             </a:fld>
             <a:endParaRPr lang="da-DK"/>
           </a:p>
@@ -2352,7 +2354,7 @@
           <a:p>
             <a:fld id="{E15B7D8E-2A20-4C0E-991C-872DBB7459A8}" type="datetimeFigureOut">
               <a:rPr lang="da-DK" smtClean="0"/>
-              <a:t>25-07-2025</a:t>
+              <a:t>05-01-2026</a:t>
             </a:fld>
             <a:endParaRPr lang="da-DK"/>
           </a:p>
@@ -2563,7 +2565,7 @@
           <a:p>
             <a:fld id="{E15B7D8E-2A20-4C0E-991C-872DBB7459A8}" type="datetimeFigureOut">
               <a:rPr lang="da-DK" smtClean="0"/>
-              <a:t>25-07-2025</a:t>
+              <a:t>05-01-2026</a:t>
             </a:fld>
             <a:endParaRPr lang="da-DK"/>
           </a:p>
@@ -5757,124 +5759,16 @@
           <a:chExt cx="0" cy="0"/>
         </a:xfrm>
       </p:grpSpPr>
-      <p:cxnSp>
-        <p:nvCxnSpPr>
-          <p:cNvPr id="6" name="Lige forbindelse 5"/>
-          <p:cNvCxnSpPr/>
-          <p:nvPr/>
-        </p:nvCxnSpPr>
-        <p:spPr>
-          <a:xfrm>
-            <a:off x="2671010" y="2021307"/>
-            <a:ext cx="5895474" cy="3520"/>
-          </a:xfrm>
-          <a:prstGeom prst="line">
-            <a:avLst/>
-          </a:prstGeom>
-          <a:ln w="76200">
-            <a:solidFill>
-              <a:schemeClr val="tx1"/>
-            </a:solidFill>
-          </a:ln>
-        </p:spPr>
-        <p:style>
-          <a:lnRef idx="1">
-            <a:schemeClr val="accent1"/>
-          </a:lnRef>
-          <a:fillRef idx="0">
-            <a:schemeClr val="accent1"/>
-          </a:fillRef>
-          <a:effectRef idx="0">
-            <a:schemeClr val="accent1"/>
-          </a:effectRef>
-          <a:fontRef idx="minor">
-            <a:schemeClr val="tx1"/>
-          </a:fontRef>
-        </p:style>
-      </p:cxnSp>
-      <p:cxnSp>
-        <p:nvCxnSpPr>
-          <p:cNvPr id="9" name="Lige forbindelse 8"/>
-          <p:cNvCxnSpPr/>
-          <p:nvPr/>
-        </p:nvCxnSpPr>
-        <p:spPr>
-          <a:xfrm>
-            <a:off x="2671009" y="4537912"/>
-            <a:ext cx="6009775" cy="1053"/>
-          </a:xfrm>
-          <a:prstGeom prst="line">
-            <a:avLst/>
-          </a:prstGeom>
-          <a:ln w="76200">
-            <a:solidFill>
-              <a:schemeClr val="tx1"/>
-            </a:solidFill>
-          </a:ln>
-        </p:spPr>
-        <p:style>
-          <a:lnRef idx="1">
-            <a:schemeClr val="accent1"/>
-          </a:lnRef>
-          <a:fillRef idx="0">
-            <a:schemeClr val="accent1"/>
-          </a:fillRef>
-          <a:effectRef idx="0">
-            <a:schemeClr val="accent1"/>
-          </a:effectRef>
-          <a:fontRef idx="minor">
-            <a:schemeClr val="tx1"/>
-          </a:fontRef>
-        </p:style>
-      </p:cxnSp>
-      <p:cxnSp>
-        <p:nvCxnSpPr>
-          <p:cNvPr id="10" name="Lige forbindelse 9"/>
-          <p:cNvCxnSpPr/>
-          <p:nvPr/>
-        </p:nvCxnSpPr>
-        <p:spPr>
-          <a:xfrm flipV="1">
-            <a:off x="5636798" y="2003256"/>
-            <a:ext cx="0" cy="2516605"/>
-          </a:xfrm>
-          <a:prstGeom prst="line">
-            <a:avLst/>
-          </a:prstGeom>
-          <a:ln w="76200">
-            <a:solidFill>
-              <a:schemeClr val="accent6">
-                <a:lumMod val="75000"/>
-              </a:schemeClr>
-            </a:solidFill>
-            <a:prstDash val="sysDash"/>
-          </a:ln>
-        </p:spPr>
-        <p:style>
-          <a:lnRef idx="1">
-            <a:schemeClr val="accent1"/>
-          </a:lnRef>
-          <a:fillRef idx="0">
-            <a:schemeClr val="accent1"/>
-          </a:fillRef>
-          <a:effectRef idx="0">
-            <a:schemeClr val="accent1"/>
-          </a:effectRef>
-          <a:fontRef idx="minor">
-            <a:schemeClr val="tx1"/>
-          </a:fontRef>
-        </p:style>
-      </p:cxnSp>
       <p:sp>
         <p:nvSpPr>
-          <p:cNvPr id="16" name="Tekstfelt 15"/>
+          <p:cNvPr id="6" name="Tekstfelt 5"/>
           <p:cNvSpPr txBox="1"/>
           <p:nvPr/>
         </p:nvSpPr>
         <p:spPr>
           <a:xfrm>
-            <a:off x="5108831" y="820978"/>
-            <a:ext cx="1019831" cy="1200329"/>
+            <a:off x="832183" y="1515979"/>
+            <a:ext cx="10508169" cy="3785652"/>
           </a:xfrm>
           <a:prstGeom prst="rect">
             <a:avLst/>
@@ -5882,107 +5776,60 @@
           <a:noFill/>
         </p:spPr>
         <p:txBody>
-          <a:bodyPr wrap="none" rtlCol="0">
+          <a:bodyPr wrap="square" rtlCol="0">
             <a:spAutoFit/>
           </a:bodyPr>
           <a:lstStyle/>
           <a:p>
             <a:r>
-              <a:rPr lang="da-DK" sz="7200"/>
-              <a:t>!</a:t>
-            </a:r>
-            <a:r>
-              <a:rPr lang="da-DK" sz="7200">
+              <a:rPr lang="da-DK" sz="4800" b="1">
+                <a:latin typeface="Consolas" panose="020B0609020204030204" pitchFamily="49" charset="0"/>
+              </a:rPr>
+              <a:t>(teen == </a:t>
+            </a:r>
+            <a:r>
+              <a:rPr lang="da-DK" sz="4800" b="1">
                 <a:solidFill>
-                  <a:srgbClr val="FF0000"/>
-                </a:solidFill>
-              </a:rPr>
-              <a:t>A</a:t>
-            </a:r>
-          </a:p>
-        </p:txBody>
-      </p:sp>
-      <p:sp>
-        <p:nvSpPr>
-          <p:cNvPr id="17" name="Smilende ansigt 16"/>
-          <p:cNvSpPr/>
-          <p:nvPr/>
-        </p:nvSpPr>
-        <p:spPr>
-          <a:xfrm>
-            <a:off x="2671009" y="2743200"/>
-            <a:ext cx="1094875" cy="1082841"/>
-          </a:xfrm>
-          <a:prstGeom prst="smileyFace">
-            <a:avLst/>
-          </a:prstGeom>
-          <a:solidFill>
-            <a:schemeClr val="accent6">
-              <a:lumMod val="75000"/>
-            </a:schemeClr>
-          </a:solidFill>
-          <a:ln>
-            <a:solidFill>
-              <a:schemeClr val="tx1"/>
-            </a:solidFill>
-          </a:ln>
-        </p:spPr>
-        <p:style>
-          <a:lnRef idx="2">
-            <a:schemeClr val="accent1">
-              <a:shade val="50000"/>
-            </a:schemeClr>
-          </a:lnRef>
-          <a:fillRef idx="1">
-            <a:schemeClr val="accent1"/>
-          </a:fillRef>
-          <a:effectRef idx="0">
-            <a:schemeClr val="accent1"/>
-          </a:effectRef>
-          <a:fontRef idx="minor">
-            <a:schemeClr val="lt1"/>
-          </a:fontRef>
-        </p:style>
-        <p:txBody>
-          <a:bodyPr rtlCol="0" anchor="ctr"/>
-          <a:lstStyle/>
-          <a:p>
-            <a:pPr algn="ctr"/>
-            <a:endParaRPr lang="da-DK"/>
-          </a:p>
-        </p:txBody>
-      </p:sp>
-      <p:sp>
-        <p:nvSpPr>
-          <p:cNvPr id="11" name="Tekstfelt 10"/>
-          <p:cNvSpPr txBox="1"/>
-          <p:nvPr/>
-        </p:nvSpPr>
-        <p:spPr>
-          <a:xfrm>
-            <a:off x="7534721" y="2389501"/>
-            <a:ext cx="808235" cy="1569660"/>
-          </a:xfrm>
-          <a:prstGeom prst="rect">
-            <a:avLst/>
-          </a:prstGeom>
-          <a:noFill/>
-        </p:spPr>
-        <p:txBody>
-          <a:bodyPr wrap="none" rtlCol="0">
-            <a:spAutoFit/>
-          </a:bodyPr>
-          <a:lstStyle/>
-          <a:p>
-            <a:r>
-              <a:rPr lang="da-DK" sz="9600">
-                <a:solidFill>
-                  <a:schemeClr val="accent4">
+                  <a:schemeClr val="accent1">
                     <a:lumMod val="75000"/>
                   </a:schemeClr>
                 </a:solidFill>
+                <a:latin typeface="Consolas" panose="020B0609020204030204" pitchFamily="49" charset="0"/>
               </a:rPr>
-              <a:t>$</a:t>
+              <a:t>true</a:t>
+            </a:r>
+            <a:r>
+              <a:rPr lang="da-DK" sz="4800" b="1">
+                <a:latin typeface="Consolas" panose="020B0609020204030204" pitchFamily="49" charset="0"/>
+              </a:rPr>
+              <a:t>)</a:t>
+            </a:r>
+          </a:p>
+          <a:p>
+            <a:endParaRPr lang="da-DK" sz="4800">
+              <a:latin typeface="Consolas" panose="020B0609020204030204" pitchFamily="49" charset="0"/>
+            </a:endParaRPr>
+          </a:p>
+          <a:p>
+            <a:pPr algn="ctr"/>
+            <a:r>
+              <a:rPr lang="da-DK" sz="4800" i="1">
+                <a:latin typeface="Consolas" panose="020B0609020204030204" pitchFamily="49" charset="0"/>
+              </a:rPr>
+              <a:t>…is the same as</a:t>
+            </a:r>
+          </a:p>
+          <a:p>
+            <a:endParaRPr lang="da-DK" sz="4800">
+              <a:latin typeface="Consolas" panose="020B0609020204030204" pitchFamily="49" charset="0"/>
+            </a:endParaRPr>
+          </a:p>
+          <a:p>
+            <a:r>
+              <a:rPr lang="da-DK" sz="4800" b="1">
+                <a:latin typeface="Consolas" panose="020B0609020204030204" pitchFamily="49" charset="0"/>
+              </a:rPr>
+              <a:t>teen</a:t>
             </a:r>
           </a:p>
         </p:txBody>
@@ -5990,7 +5837,7 @@
     </p:spTree>
     <p:extLst>
       <p:ext uri="{BB962C8B-B14F-4D97-AF65-F5344CB8AC3E}">
-        <p14:creationId xmlns:p14="http://schemas.microsoft.com/office/powerpoint/2010/main" val="3686444016"/>
+        <p14:creationId xmlns:p14="http://schemas.microsoft.com/office/powerpoint/2010/main" val="3214600998"/>
       </p:ext>
     </p:extLst>
   </p:cSld>
@@ -7109,6 +6956,395 @@
           <a:chExt cx="0" cy="0"/>
         </a:xfrm>
       </p:grpSpPr>
+      <p:sp>
+        <p:nvSpPr>
+          <p:cNvPr id="6" name="Tekstfelt 5"/>
+          <p:cNvSpPr txBox="1"/>
+          <p:nvPr/>
+        </p:nvSpPr>
+        <p:spPr>
+          <a:xfrm>
+            <a:off x="832183" y="1515979"/>
+            <a:ext cx="10508169" cy="3785652"/>
+          </a:xfrm>
+          <a:prstGeom prst="rect">
+            <a:avLst/>
+          </a:prstGeom>
+          <a:noFill/>
+        </p:spPr>
+        <p:txBody>
+          <a:bodyPr wrap="square" rtlCol="0">
+            <a:spAutoFit/>
+          </a:bodyPr>
+          <a:lstStyle/>
+          <a:p>
+            <a:r>
+              <a:rPr lang="da-DK" sz="4800" b="1">
+                <a:latin typeface="Consolas" panose="020B0609020204030204" pitchFamily="49" charset="0"/>
+              </a:rPr>
+              <a:t>(teen == </a:t>
+            </a:r>
+            <a:r>
+              <a:rPr lang="da-DK" sz="4800" b="1">
+                <a:solidFill>
+                  <a:schemeClr val="accent1">
+                    <a:lumMod val="75000"/>
+                  </a:schemeClr>
+                </a:solidFill>
+                <a:latin typeface="Consolas" panose="020B0609020204030204" pitchFamily="49" charset="0"/>
+              </a:rPr>
+              <a:t>false</a:t>
+            </a:r>
+            <a:r>
+              <a:rPr lang="da-DK" sz="4800" b="1">
+                <a:latin typeface="Consolas" panose="020B0609020204030204" pitchFamily="49" charset="0"/>
+              </a:rPr>
+              <a:t>)</a:t>
+            </a:r>
+          </a:p>
+          <a:p>
+            <a:endParaRPr lang="da-DK" sz="4800">
+              <a:latin typeface="Consolas" panose="020B0609020204030204" pitchFamily="49" charset="0"/>
+            </a:endParaRPr>
+          </a:p>
+          <a:p>
+            <a:pPr algn="ctr"/>
+            <a:r>
+              <a:rPr lang="da-DK" sz="4800" i="1">
+                <a:latin typeface="Consolas" panose="020B0609020204030204" pitchFamily="49" charset="0"/>
+              </a:rPr>
+              <a:t>…is the same as</a:t>
+            </a:r>
+          </a:p>
+          <a:p>
+            <a:endParaRPr lang="da-DK" sz="4800">
+              <a:latin typeface="Consolas" panose="020B0609020204030204" pitchFamily="49" charset="0"/>
+            </a:endParaRPr>
+          </a:p>
+          <a:p>
+            <a:r>
+              <a:rPr lang="da-DK" sz="4800" b="1">
+                <a:latin typeface="Consolas" panose="020B0609020204030204" pitchFamily="49" charset="0"/>
+              </a:rPr>
+              <a:t>!teen</a:t>
+            </a:r>
+          </a:p>
+        </p:txBody>
+      </p:sp>
+    </p:spTree>
+    <p:extLst>
+      <p:ext uri="{BB962C8B-B14F-4D97-AF65-F5344CB8AC3E}">
+        <p14:creationId xmlns:p14="http://schemas.microsoft.com/office/powerpoint/2010/main" val="1735589210"/>
+      </p:ext>
+    </p:extLst>
+  </p:cSld>
+  <p:clrMapOvr>
+    <a:masterClrMapping/>
+  </p:clrMapOvr>
+  <mc:AlternateContent xmlns:mc="http://schemas.openxmlformats.org/markup-compatibility/2006" xmlns:p14="http://schemas.microsoft.com/office/powerpoint/2010/main">
+    <mc:Choice Requires="p14">
+      <p:transition spd="med" p14:dur="700">
+        <p:fade/>
+      </p:transition>
+    </mc:Choice>
+    <mc:Fallback xmlns="">
+      <p:transition spd="med">
+        <p:fade/>
+      </p:transition>
+    </mc:Fallback>
+  </mc:AlternateContent>
+</p:sld>
+</file>
+
+<file path=ppt/slides/slide21.xml><?xml version="1.0" encoding="utf-8"?>
+<p:sld xmlns:a="http://schemas.openxmlformats.org/drawingml/2006/main" xmlns:r="http://schemas.openxmlformats.org/officeDocument/2006/relationships" xmlns:p="http://schemas.openxmlformats.org/presentationml/2006/main">
+  <p:cSld>
+    <p:spTree>
+      <p:nvGrpSpPr>
+        <p:cNvPr id="1" name=""/>
+        <p:cNvGrpSpPr/>
+        <p:nvPr/>
+      </p:nvGrpSpPr>
+      <p:grpSpPr>
+        <a:xfrm>
+          <a:off x="0" y="0"/>
+          <a:ext cx="0" cy="0"/>
+          <a:chOff x="0" y="0"/>
+          <a:chExt cx="0" cy="0"/>
+        </a:xfrm>
+      </p:grpSpPr>
+      <p:cxnSp>
+        <p:nvCxnSpPr>
+          <p:cNvPr id="6" name="Lige forbindelse 5"/>
+          <p:cNvCxnSpPr/>
+          <p:nvPr/>
+        </p:nvCxnSpPr>
+        <p:spPr>
+          <a:xfrm>
+            <a:off x="2671010" y="2021307"/>
+            <a:ext cx="5895474" cy="3520"/>
+          </a:xfrm>
+          <a:prstGeom prst="line">
+            <a:avLst/>
+          </a:prstGeom>
+          <a:ln w="76200">
+            <a:solidFill>
+              <a:schemeClr val="tx1"/>
+            </a:solidFill>
+          </a:ln>
+        </p:spPr>
+        <p:style>
+          <a:lnRef idx="1">
+            <a:schemeClr val="accent1"/>
+          </a:lnRef>
+          <a:fillRef idx="0">
+            <a:schemeClr val="accent1"/>
+          </a:fillRef>
+          <a:effectRef idx="0">
+            <a:schemeClr val="accent1"/>
+          </a:effectRef>
+          <a:fontRef idx="minor">
+            <a:schemeClr val="tx1"/>
+          </a:fontRef>
+        </p:style>
+      </p:cxnSp>
+      <p:cxnSp>
+        <p:nvCxnSpPr>
+          <p:cNvPr id="9" name="Lige forbindelse 8"/>
+          <p:cNvCxnSpPr/>
+          <p:nvPr/>
+        </p:nvCxnSpPr>
+        <p:spPr>
+          <a:xfrm>
+            <a:off x="2671009" y="4537912"/>
+            <a:ext cx="6009775" cy="1053"/>
+          </a:xfrm>
+          <a:prstGeom prst="line">
+            <a:avLst/>
+          </a:prstGeom>
+          <a:ln w="76200">
+            <a:solidFill>
+              <a:schemeClr val="tx1"/>
+            </a:solidFill>
+          </a:ln>
+        </p:spPr>
+        <p:style>
+          <a:lnRef idx="1">
+            <a:schemeClr val="accent1"/>
+          </a:lnRef>
+          <a:fillRef idx="0">
+            <a:schemeClr val="accent1"/>
+          </a:fillRef>
+          <a:effectRef idx="0">
+            <a:schemeClr val="accent1"/>
+          </a:effectRef>
+          <a:fontRef idx="minor">
+            <a:schemeClr val="tx1"/>
+          </a:fontRef>
+        </p:style>
+      </p:cxnSp>
+      <p:cxnSp>
+        <p:nvCxnSpPr>
+          <p:cNvPr id="10" name="Lige forbindelse 9"/>
+          <p:cNvCxnSpPr/>
+          <p:nvPr/>
+        </p:nvCxnSpPr>
+        <p:spPr>
+          <a:xfrm flipV="1">
+            <a:off x="5636798" y="2003256"/>
+            <a:ext cx="0" cy="2516605"/>
+          </a:xfrm>
+          <a:prstGeom prst="line">
+            <a:avLst/>
+          </a:prstGeom>
+          <a:ln w="76200">
+            <a:solidFill>
+              <a:schemeClr val="accent6">
+                <a:lumMod val="75000"/>
+              </a:schemeClr>
+            </a:solidFill>
+            <a:prstDash val="sysDash"/>
+          </a:ln>
+        </p:spPr>
+        <p:style>
+          <a:lnRef idx="1">
+            <a:schemeClr val="accent1"/>
+          </a:lnRef>
+          <a:fillRef idx="0">
+            <a:schemeClr val="accent1"/>
+          </a:fillRef>
+          <a:effectRef idx="0">
+            <a:schemeClr val="accent1"/>
+          </a:effectRef>
+          <a:fontRef idx="minor">
+            <a:schemeClr val="tx1"/>
+          </a:fontRef>
+        </p:style>
+      </p:cxnSp>
+      <p:sp>
+        <p:nvSpPr>
+          <p:cNvPr id="16" name="Tekstfelt 15"/>
+          <p:cNvSpPr txBox="1"/>
+          <p:nvPr/>
+        </p:nvSpPr>
+        <p:spPr>
+          <a:xfrm>
+            <a:off x="5108831" y="820978"/>
+            <a:ext cx="1019831" cy="1200329"/>
+          </a:xfrm>
+          <a:prstGeom prst="rect">
+            <a:avLst/>
+          </a:prstGeom>
+          <a:noFill/>
+        </p:spPr>
+        <p:txBody>
+          <a:bodyPr wrap="none" rtlCol="0">
+            <a:spAutoFit/>
+          </a:bodyPr>
+          <a:lstStyle/>
+          <a:p>
+            <a:r>
+              <a:rPr lang="da-DK" sz="7200"/>
+              <a:t>!</a:t>
+            </a:r>
+            <a:r>
+              <a:rPr lang="da-DK" sz="7200">
+                <a:solidFill>
+                  <a:srgbClr val="FF0000"/>
+                </a:solidFill>
+              </a:rPr>
+              <a:t>A</a:t>
+            </a:r>
+          </a:p>
+        </p:txBody>
+      </p:sp>
+      <p:sp>
+        <p:nvSpPr>
+          <p:cNvPr id="17" name="Smilende ansigt 16"/>
+          <p:cNvSpPr/>
+          <p:nvPr/>
+        </p:nvSpPr>
+        <p:spPr>
+          <a:xfrm>
+            <a:off x="2671009" y="2743200"/>
+            <a:ext cx="1094875" cy="1082841"/>
+          </a:xfrm>
+          <a:prstGeom prst="smileyFace">
+            <a:avLst/>
+          </a:prstGeom>
+          <a:solidFill>
+            <a:schemeClr val="accent6">
+              <a:lumMod val="75000"/>
+            </a:schemeClr>
+          </a:solidFill>
+          <a:ln>
+            <a:solidFill>
+              <a:schemeClr val="tx1"/>
+            </a:solidFill>
+          </a:ln>
+        </p:spPr>
+        <p:style>
+          <a:lnRef idx="2">
+            <a:schemeClr val="accent1">
+              <a:shade val="50000"/>
+            </a:schemeClr>
+          </a:lnRef>
+          <a:fillRef idx="1">
+            <a:schemeClr val="accent1"/>
+          </a:fillRef>
+          <a:effectRef idx="0">
+            <a:schemeClr val="accent1"/>
+          </a:effectRef>
+          <a:fontRef idx="minor">
+            <a:schemeClr val="lt1"/>
+          </a:fontRef>
+        </p:style>
+        <p:txBody>
+          <a:bodyPr rtlCol="0" anchor="ctr"/>
+          <a:lstStyle/>
+          <a:p>
+            <a:pPr algn="ctr"/>
+            <a:endParaRPr lang="da-DK"/>
+          </a:p>
+        </p:txBody>
+      </p:sp>
+      <p:sp>
+        <p:nvSpPr>
+          <p:cNvPr id="11" name="Tekstfelt 10"/>
+          <p:cNvSpPr txBox="1"/>
+          <p:nvPr/>
+        </p:nvSpPr>
+        <p:spPr>
+          <a:xfrm>
+            <a:off x="7534721" y="2389501"/>
+            <a:ext cx="808235" cy="1569660"/>
+          </a:xfrm>
+          <a:prstGeom prst="rect">
+            <a:avLst/>
+          </a:prstGeom>
+          <a:noFill/>
+        </p:spPr>
+        <p:txBody>
+          <a:bodyPr wrap="none" rtlCol="0">
+            <a:spAutoFit/>
+          </a:bodyPr>
+          <a:lstStyle/>
+          <a:p>
+            <a:r>
+              <a:rPr lang="da-DK" sz="9600">
+                <a:solidFill>
+                  <a:schemeClr val="accent4">
+                    <a:lumMod val="75000"/>
+                  </a:schemeClr>
+                </a:solidFill>
+              </a:rPr>
+              <a:t>$</a:t>
+            </a:r>
+          </a:p>
+        </p:txBody>
+      </p:sp>
+    </p:spTree>
+    <p:extLst>
+      <p:ext uri="{BB962C8B-B14F-4D97-AF65-F5344CB8AC3E}">
+        <p14:creationId xmlns:p14="http://schemas.microsoft.com/office/powerpoint/2010/main" val="3686444016"/>
+      </p:ext>
+    </p:extLst>
+  </p:cSld>
+  <p:clrMapOvr>
+    <a:masterClrMapping/>
+  </p:clrMapOvr>
+  <mc:AlternateContent xmlns:mc="http://schemas.openxmlformats.org/markup-compatibility/2006" xmlns:p14="http://schemas.microsoft.com/office/powerpoint/2010/main">
+    <mc:Choice Requires="p14">
+      <p:transition spd="med" p14:dur="700">
+        <p:fade/>
+      </p:transition>
+    </mc:Choice>
+    <mc:Fallback xmlns="">
+      <p:transition spd="med">
+        <p:fade/>
+      </p:transition>
+    </mc:Fallback>
+  </mc:AlternateContent>
+</p:sld>
+</file>
+
+<file path=ppt/slides/slide22.xml><?xml version="1.0" encoding="utf-8"?>
+<p:sld xmlns:a="http://schemas.openxmlformats.org/drawingml/2006/main" xmlns:r="http://schemas.openxmlformats.org/officeDocument/2006/relationships" xmlns:p="http://schemas.openxmlformats.org/presentationml/2006/main">
+  <p:cSld>
+    <p:spTree>
+      <p:nvGrpSpPr>
+        <p:cNvPr id="1" name=""/>
+        <p:cNvGrpSpPr/>
+        <p:nvPr/>
+      </p:nvGrpSpPr>
+      <p:grpSpPr>
+        <a:xfrm>
+          <a:off x="0" y="0"/>
+          <a:ext cx="0" cy="0"/>
+          <a:chOff x="0" y="0"/>
+          <a:chExt cx="0" cy="0"/>
+        </a:xfrm>
+      </p:grpSpPr>
       <p:cxnSp>
         <p:nvCxnSpPr>
           <p:cNvPr id="6" name="Lige forbindelse 5"/>
@@ -7362,7 +7598,7 @@
 </p:sld>
 </file>
 
-<file path=ppt/slides/slide21.xml><?xml version="1.0" encoding="utf-8"?>
+<file path=ppt/slides/slide23.xml><?xml version="1.0" encoding="utf-8"?>
 <p:sld xmlns:a="http://schemas.openxmlformats.org/drawingml/2006/main" xmlns:r="http://schemas.openxmlformats.org/officeDocument/2006/relationships" xmlns:p="http://schemas.openxmlformats.org/presentationml/2006/main">
   <p:cSld>
     <p:spTree>
